--- a/docs/CPMG_PI_Update_3Sep2026.pptx
+++ b/docs/CPMG_PI_Update_3Sep2026.pptx
@@ -683,7 +683,7 @@
           <a:p>
             <a:r>
               <a:rPr lang="en-US" dirty="0"/>
-              <a:t>Important design choice: the model is given only quantities knowable at the spectrometer. An earlier version conditioned on k_ex, p_B and delta-omega, which are exactly what the experiment is trying to measure, so it could never be used on real data. On clean simulated data the method works very well.</a:t>
+              <a:t>Important design choice: the model is given only quantities knowable at the spectrometer. An earlier version conditioned on k_ex, p_B and delta-omega, which are exactly what the experiment is trying to measure, so it could never be used on real data. On the architecture question: the convolutional network wins at both dataset sizes, and at 500k its typical error is about half either Transformer variant, so the ranking is now on firm ground. Whether the Transformer carries a positional encoding made about one percentage point of difference in both directions across the two dataset sizes, i.e. within run-to-run variation, so nothing should be read into it.</a:t>
             </a:r>
             <a:endParaRPr lang="en-US" dirty="0"/>
           </a:p>
@@ -2066,7 +2066,7 @@
                 <a:ea typeface="Calibri" pitchFamily="34" charset="-122"/>
                 <a:cs typeface="Calibri" pitchFamily="34" charset="-120"/>
               </a:rPr>
-              <a:t>Baseline ladder — 60 k training set, clean data</a:t>
+              <a:t>Baseline ladder — 500 k training set, clean data</a:t>
             </a:r>
             <a:endParaRPr lang="en-US" sz="1300" dirty="0"/>
           </a:p>
@@ -2236,7 +2236,7 @@
                 <a:ea typeface="Calibri" pitchFamily="34" charset="-122"/>
                 <a:cs typeface="Calibri" pitchFamily="34" charset="-120"/>
               </a:rPr>
-              <a:t>0.839</a:t>
+              <a:t>0.819</a:t>
             </a:r>
             <a:endParaRPr lang="en-US" sz="1250" dirty="0"/>
           </a:p>
@@ -2392,7 +2392,7 @@
                 <a:ea typeface="Calibri" pitchFamily="34" charset="-122"/>
                 <a:cs typeface="Calibri" pitchFamily="34" charset="-120"/>
               </a:rPr>
-              <a:t>0.606</a:t>
+              <a:t>0.541</a:t>
             </a:r>
             <a:endParaRPr lang="en-US" sz="1250" dirty="0"/>
           </a:p>
@@ -2431,7 +2431,7 @@
                 <a:ea typeface="Calibri" pitchFamily="34" charset="-122"/>
                 <a:cs typeface="Calibri" pitchFamily="34" charset="-120"/>
               </a:rPr>
-              <a:t>27.8%</a:t>
+              <a:t>33.9%</a:t>
             </a:r>
             <a:endParaRPr lang="en-US" sz="1250" dirty="0"/>
           </a:p>
@@ -2548,7 +2548,7 @@
                 <a:ea typeface="Calibri" pitchFamily="34" charset="-122"/>
                 <a:cs typeface="Calibri" pitchFamily="34" charset="-120"/>
               </a:rPr>
-              <a:t>0.355</a:t>
+              <a:t>0.206</a:t>
             </a:r>
             <a:endParaRPr lang="en-US" sz="1250" dirty="0"/>
           </a:p>
@@ -2587,7 +2587,7 @@
                 <a:ea typeface="Calibri" pitchFamily="34" charset="-122"/>
                 <a:cs typeface="Calibri" pitchFamily="34" charset="-120"/>
               </a:rPr>
-              <a:t>57.7%</a:t>
+              <a:t>74.9%</a:t>
             </a:r>
             <a:endParaRPr lang="en-US" sz="1250" dirty="0"/>
           </a:p>
@@ -2665,7 +2665,7 @@
                 <a:ea typeface="Calibri" pitchFamily="34" charset="-122"/>
                 <a:cs typeface="Calibri" pitchFamily="34" charset="-120"/>
               </a:rPr>
-              <a:t>586 K</a:t>
+              <a:t>581 K</a:t>
             </a:r>
             <a:endParaRPr lang="en-US" sz="1250" dirty="0"/>
           </a:p>
@@ -2704,7 +2704,7 @@
                 <a:ea typeface="Calibri" pitchFamily="34" charset="-122"/>
                 <a:cs typeface="Calibri" pitchFamily="34" charset="-120"/>
               </a:rPr>
-              <a:t>0.219</a:t>
+              <a:t>0.071</a:t>
             </a:r>
             <a:endParaRPr lang="en-US" sz="1250" dirty="0"/>
           </a:p>
@@ -2743,7 +2743,7 @@
                 <a:ea typeface="Calibri" pitchFamily="34" charset="-122"/>
                 <a:cs typeface="Calibri" pitchFamily="34" charset="-120"/>
               </a:rPr>
-              <a:t>74.0%</a:t>
+              <a:t>91.3%</a:t>
             </a:r>
             <a:endParaRPr lang="en-US" sz="1250" dirty="0"/>
           </a:p>
@@ -2887,7 +2887,7 @@
                 <a:ea typeface="Calibri" pitchFamily="34" charset="-122"/>
                 <a:cs typeface="Calibri" pitchFamily="34" charset="-120"/>
               </a:rPr>
-              <a:t>0.148</a:t>
+              <a:t>0.053</a:t>
             </a:r>
             <a:endParaRPr lang="en-US" sz="1250" dirty="0"/>
           </a:p>
@@ -2926,7 +2926,7 @@
                 <a:ea typeface="Calibri" pitchFamily="34" charset="-122"/>
                 <a:cs typeface="Calibri" pitchFamily="34" charset="-120"/>
               </a:rPr>
-              <a:t>82.4%</a:t>
+              <a:t>93.5%</a:t>
             </a:r>
             <a:endParaRPr lang="en-US" sz="1250" dirty="0"/>
           </a:p>
@@ -3260,7 +3260,7 @@
                 <a:ea typeface="Calibri" pitchFamily="34" charset="-122"/>
                 <a:cs typeface="Calibri" pitchFamily="34" charset="-120"/>
               </a:rPr>
-              <a:t>Caveat: the architecture ranking above was measured at 60 k, inside a data-limited regime. Re-running the full ladder at 500 k (in progress).</a:t>
+              <a:t>Confirmed at 500 k (completed overnight): the convolutional network still wins, and by a wider margin — its typical error is 2× lower than either Transformer variant.</a:t>
             </a:r>
             <a:endParaRPr lang="en-US" sz="1150" dirty="0"/>
           </a:p>

--- a/docs/CPMG_PI_Update_3Sep2026.pptx
+++ b/docs/CPMG_PI_Update_3Sep2026.pptx
@@ -947,7 +947,7 @@
           <a:p>
             <a:r>
               <a:rPr lang="en-US" dirty="0"/>
-              <a:t>The headline for discussion: 93.5 percent clean recoverability says the simulator and the model are sound. The obstacle is entirely that the artefact sits under the noise at standard SNR. The highest-value next step is narrowing the parameter ranges, which is the conversation I wanted to have with you.</a:t>
+              <a:t>The headline for discussion: 93.5 percent clean recoverability says the simulator and the model are sound. The obstacle is entirely that the artefact sits under the noise at standard SNR. We checked whether the acquisition could be redesigned to get around this - more frequency points, longer relaxation delays - and it cannot: once you charge for the instrument time, sampling more points is no better than simply repeating the measurement. That makes narrowing the parameter ranges the only lever that costs nothing, which is the conversation I wanted to have with you.</a:t>
             </a:r>
             <a:endParaRPr lang="en-US" dirty="0"/>
           </a:p>
@@ -4650,7 +4650,7 @@
                 <a:ea typeface="Calibri" pitchFamily="34" charset="-122"/>
                 <a:cs typeface="Calibri" pitchFamily="34" charset="-120"/>
               </a:rPr>
-              <a:t>Narrow the parameter ranges to a realistic envelope — the recoverable corner is well defined, and 4% of sampled points are physically unmeasurable.</a:t>
+              <a:t>Narrow the parameter ranges — now the only free lever. The recoverable corner is well defined, and 4% of sampled points are physically unmeasurable.</a:t>
             </a:r>
             <a:endParaRPr lang="en-US" sz="1250" dirty="0"/>
           </a:p>
@@ -4728,7 +4728,7 @@
                 <a:ea typeface="Calibri" pitchFamily="34" charset="-122"/>
                 <a:cs typeface="Calibri" pitchFamily="34" charset="-120"/>
               </a:rPr>
-              <a:t>More ν points / longer T rather than more averaging — 100 averages would be needed to make most artefacts visible.</a:t>
+              <a:t>Instrument time is the binding cost. More ν points and more averages are interchangeable at equal time; ~8× the current acquisition reaches ~60% detectability.</a:t>
             </a:r>
             <a:endParaRPr lang="en-US" sz="1250" dirty="0"/>
           </a:p>
@@ -4806,7 +4806,7 @@
                 <a:ea typeface="Calibri" pitchFamily="34" charset="-122"/>
                 <a:cs typeface="Calibri" pitchFamily="34" charset="-120"/>
               </a:rPr>
-              <a:t>Re-run the architecture ladder at 500 k (running overnight); the 60 k ranking was data-limited.</a:t>
+              <a:t>Validate against experimental data for a system with independently known exchange parameters.</a:t>
             </a:r>
             <a:endParaRPr lang="en-US" sz="1250" dirty="0"/>
           </a:p>
